--- a/AutoChecker_Presentation.pptx
+++ b/AutoChecker_Presentation.pptx
@@ -3602,7 +3602,7 @@
         <p:spPr>
           <a:xfrm>
             <a:off x="457200" y="4800600"/>
-            <a:ext cx="8229600" cy="274320"/>
+            <a:ext cx="8229600" cy="230832"/>
           </a:xfrm>
           <a:prstGeom prst="rect">
             <a:avLst/>
@@ -3617,13 +3617,26 @@
           <a:p>
             <a:pPr algn="l"/>
             <a:r>
-              <a:rPr sz="900" b="0" i="0">
+              <a:rPr sz="900" b="0" i="0" dirty="0">
                 <a:solidFill>
                   <a:srgbClr val="808080"/>
                 </a:solidFill>
               </a:rPr>
-              <a:t>MODERN WEB &amp; MOBILE APPLICATIONS  ·  2025</a:t>
-            </a:r>
+              <a:t>MODERN WEB &amp; MOBILE APPLICATIONS  ·  202</a:t>
+            </a:r>
+            <a:r>
+              <a:rPr lang="en-US" sz="900" b="0" i="0" dirty="0">
+                <a:solidFill>
+                  <a:srgbClr val="808080"/>
+                </a:solidFill>
+              </a:rPr>
+              <a:t>6</a:t>
+            </a:r>
+            <a:endParaRPr sz="900" b="0" i="0" dirty="0">
+              <a:solidFill>
+                <a:srgbClr val="808080"/>
+              </a:solidFill>
+            </a:endParaRPr>
           </a:p>
         </p:txBody>
       </p:sp>
@@ -7809,7 +7822,7 @@
         <p:spPr>
           <a:xfrm>
             <a:off x="457200" y="4800600"/>
-            <a:ext cx="8229600" cy="256032"/>
+            <a:ext cx="8229600" cy="230832"/>
           </a:xfrm>
           <a:prstGeom prst="rect">
             <a:avLst/>
@@ -7829,8 +7842,21 @@
                   <a:srgbClr val="808080"/>
                 </a:solidFill>
               </a:rPr>
-              <a:t>Team INZOCO  ·  Modern Web &amp; Mobile Applications  ·  2025</a:t>
-            </a:r>
+              <a:t>Team INZOCO  ·  Modern Web &amp; Mobile Applications  ·  202</a:t>
+            </a:r>
+            <a:r>
+              <a:rPr lang="en-US" sz="900" b="0" i="0">
+                <a:solidFill>
+                  <a:srgbClr val="808080"/>
+                </a:solidFill>
+              </a:rPr>
+              <a:t>6</a:t>
+            </a:r>
+            <a:endParaRPr sz="900" b="0" i="0">
+              <a:solidFill>
+                <a:srgbClr val="808080"/>
+              </a:solidFill>
+            </a:endParaRPr>
           </a:p>
         </p:txBody>
       </p:sp>
@@ -14092,8 +14118,8 @@
         </p:blipFill>
         <p:spPr>
           <a:xfrm>
-            <a:off x="4363602" y="1042416"/>
-            <a:ext cx="1792224" cy="3621024"/>
+            <a:off x="4407408" y="1042416"/>
+            <a:ext cx="1674553" cy="3383280"/>
           </a:xfrm>
           <a:prstGeom prst="rect">
             <a:avLst/>
@@ -14152,7 +14178,7 @@
         </p:nvSpPr>
         <p:spPr>
           <a:xfrm>
-            <a:off x="4163710" y="3959352"/>
+            <a:off x="4163710" y="4373118"/>
             <a:ext cx="2103120" cy="274320"/>
           </a:xfrm>
           <a:prstGeom prst="rect">
@@ -14186,7 +14212,7 @@
         </p:nvSpPr>
         <p:spPr>
           <a:xfrm>
-            <a:off x="4163710" y="4096512"/>
+            <a:off x="4210812" y="4546216"/>
             <a:ext cx="2103120" cy="274320"/>
           </a:xfrm>
           <a:prstGeom prst="rect">
@@ -19403,27 +19429,27 @@
         <p:spPr>
           <a:xfrm>
             <a:off x="457200" y="4800600"/>
-            <a:ext cx="8229600" cy="274320"/>
-          </a:xfrm>
-          <a:prstGeom prst="rect">
-            <a:avLst/>
-          </a:prstGeom>
-          <a:noFill/>
-        </p:spPr>
-        <p:txBody>
-          <a:bodyPr wrap="square">
-            <a:spAutoFit/>
-          </a:bodyPr>
-          <a:lstStyle/>
-          <a:p>
-            <a:pPr algn="ctr"/>
-            <a:r>
-              <a:rPr sz="900" b="0">
+            <a:ext cx="8229600" cy="230832"/>
+          </a:xfrm>
+          <a:prstGeom prst="rect">
+            <a:avLst/>
+          </a:prstGeom>
+          <a:noFill/>
+        </p:spPr>
+        <p:txBody>
+          <a:bodyPr wrap="square">
+            <a:spAutoFit/>
+          </a:bodyPr>
+          <a:lstStyle/>
+          <a:p>
+            <a:pPr algn="ctr"/>
+            <a:r>
+              <a:rPr sz="900" b="0" dirty="0">
                 <a:solidFill>
                   <a:srgbClr val="808080"/>
                 </a:solidFill>
               </a:rPr>
-              <a:t>All components containerized with Docker  ·  Deployed on cloud server</a:t>
+              <a:t>All components containerized with Docker</a:t>
             </a:r>
           </a:p>
         </p:txBody>
